--- a/Calendario2025/Ejercicios/E13_NAT/Ejercicio13.pptx
+++ b/Calendario2025/Ejercicios/E13_NAT/Ejercicio13.pptx
@@ -218,7 +218,7 @@
           <a:p>
             <a:fld id="{2D445F07-8756-451B-A938-0248325FC7BB}" type="datetimeFigureOut">
               <a:rPr lang="es-MX" smtClean="0"/>
-              <a:t>22/04/2025</a:t>
+              <a:t>26/05/2025</a:t>
             </a:fld>
             <a:endParaRPr lang="es-MX" dirty="0"/>
           </a:p>
@@ -835,7 +835,7 @@
           <a:p>
             <a:fld id="{5E75A0DC-66C6-4CEC-A5EB-F8C97CEC3796}" type="datetimeFigureOut">
               <a:rPr lang="es-MX" smtClean="0"/>
-              <a:t>22/04/2025</a:t>
+              <a:t>26/05/2025</a:t>
             </a:fld>
             <a:endParaRPr lang="es-MX" dirty="0"/>
           </a:p>
@@ -1005,7 +1005,7 @@
           <a:p>
             <a:fld id="{5E75A0DC-66C6-4CEC-A5EB-F8C97CEC3796}" type="datetimeFigureOut">
               <a:rPr lang="es-MX" smtClean="0"/>
-              <a:t>22/04/2025</a:t>
+              <a:t>26/05/2025</a:t>
             </a:fld>
             <a:endParaRPr lang="es-MX" dirty="0"/>
           </a:p>
@@ -1185,7 +1185,7 @@
           <a:p>
             <a:fld id="{5E75A0DC-66C6-4CEC-A5EB-F8C97CEC3796}" type="datetimeFigureOut">
               <a:rPr lang="es-MX" smtClean="0"/>
-              <a:t>22/04/2025</a:t>
+              <a:t>26/05/2025</a:t>
             </a:fld>
             <a:endParaRPr lang="es-MX" dirty="0"/>
           </a:p>
@@ -1355,7 +1355,7 @@
           <a:p>
             <a:fld id="{5E75A0DC-66C6-4CEC-A5EB-F8C97CEC3796}" type="datetimeFigureOut">
               <a:rPr lang="es-MX" smtClean="0"/>
-              <a:t>22/04/2025</a:t>
+              <a:t>26/05/2025</a:t>
             </a:fld>
             <a:endParaRPr lang="es-MX" dirty="0"/>
           </a:p>
@@ -1601,7 +1601,7 @@
           <a:p>
             <a:fld id="{5E75A0DC-66C6-4CEC-A5EB-F8C97CEC3796}" type="datetimeFigureOut">
               <a:rPr lang="es-MX" smtClean="0"/>
-              <a:t>22/04/2025</a:t>
+              <a:t>26/05/2025</a:t>
             </a:fld>
             <a:endParaRPr lang="es-MX" dirty="0"/>
           </a:p>
@@ -1889,7 +1889,7 @@
           <a:p>
             <a:fld id="{5E75A0DC-66C6-4CEC-A5EB-F8C97CEC3796}" type="datetimeFigureOut">
               <a:rPr lang="es-MX" smtClean="0"/>
-              <a:t>22/04/2025</a:t>
+              <a:t>26/05/2025</a:t>
             </a:fld>
             <a:endParaRPr lang="es-MX" dirty="0"/>
           </a:p>
@@ -2311,7 +2311,7 @@
           <a:p>
             <a:fld id="{5E75A0DC-66C6-4CEC-A5EB-F8C97CEC3796}" type="datetimeFigureOut">
               <a:rPr lang="es-MX" smtClean="0"/>
-              <a:t>22/04/2025</a:t>
+              <a:t>26/05/2025</a:t>
             </a:fld>
             <a:endParaRPr lang="es-MX" dirty="0"/>
           </a:p>
@@ -2429,7 +2429,7 @@
           <a:p>
             <a:fld id="{5E75A0DC-66C6-4CEC-A5EB-F8C97CEC3796}" type="datetimeFigureOut">
               <a:rPr lang="es-MX" smtClean="0"/>
-              <a:t>22/04/2025</a:t>
+              <a:t>26/05/2025</a:t>
             </a:fld>
             <a:endParaRPr lang="es-MX" dirty="0"/>
           </a:p>
@@ -2524,7 +2524,7 @@
           <a:p>
             <a:fld id="{5E75A0DC-66C6-4CEC-A5EB-F8C97CEC3796}" type="datetimeFigureOut">
               <a:rPr lang="es-MX" smtClean="0"/>
-              <a:t>22/04/2025</a:t>
+              <a:t>26/05/2025</a:t>
             </a:fld>
             <a:endParaRPr lang="es-MX" dirty="0"/>
           </a:p>
@@ -2801,7 +2801,7 @@
           <a:p>
             <a:fld id="{5E75A0DC-66C6-4CEC-A5EB-F8C97CEC3796}" type="datetimeFigureOut">
               <a:rPr lang="es-MX" smtClean="0"/>
-              <a:t>22/04/2025</a:t>
+              <a:t>26/05/2025</a:t>
             </a:fld>
             <a:endParaRPr lang="es-MX" dirty="0"/>
           </a:p>
@@ -3054,7 +3054,7 @@
           <a:p>
             <a:fld id="{5E75A0DC-66C6-4CEC-A5EB-F8C97CEC3796}" type="datetimeFigureOut">
               <a:rPr lang="es-MX" smtClean="0"/>
-              <a:t>22/04/2025</a:t>
+              <a:t>26/05/2025</a:t>
             </a:fld>
             <a:endParaRPr lang="es-MX" dirty="0"/>
           </a:p>
@@ -3267,7 +3267,7 @@
           <a:p>
             <a:fld id="{5E75A0DC-66C6-4CEC-A5EB-F8C97CEC3796}" type="datetimeFigureOut">
               <a:rPr lang="es-MX" smtClean="0"/>
-              <a:t>22/04/2025</a:t>
+              <a:t>26/05/2025</a:t>
             </a:fld>
             <a:endParaRPr lang="es-MX" dirty="0"/>
           </a:p>
@@ -3937,7 +3937,7 @@
         <p:spPr bwMode="auto">
           <a:xfrm>
             <a:off x="251520" y="941013"/>
-            <a:ext cx="8640960" cy="3053208"/>
+            <a:ext cx="8640960" cy="2714654"/>
           </a:xfrm>
           <a:prstGeom prst="rect">
             <a:avLst/>
@@ -4080,7 +4080,7 @@
               <a:buAutoNum type="arabicPeriod" startAt="4"/>
             </a:pPr>
             <a:r>
-              <a:rPr lang="es-MX" sz="1400" dirty="0">
+              <a:rPr lang="es-MX" sz="1200" dirty="0">
                 <a:solidFill>
                   <a:schemeClr val="bg2">
                     <a:lumMod val="25000"/>
@@ -4092,7 +4092,7 @@
               <a:t>Especificar las </a:t>
             </a:r>
             <a:r>
-              <a:rPr lang="es-MX" sz="1400" b="1" dirty="0">
+              <a:rPr lang="es-MX" sz="1200" b="1" dirty="0">
                 <a:solidFill>
                   <a:schemeClr val="bg2">
                     <a:lumMod val="25000"/>
@@ -4104,7 +4104,7 @@
               <a:t>interfaces interiores y exteriores</a:t>
             </a:r>
             <a:r>
-              <a:rPr lang="es-MX" sz="1400" dirty="0">
+              <a:rPr lang="es-MX" sz="1200" dirty="0">
                 <a:solidFill>
                   <a:schemeClr val="bg2">
                     <a:lumMod val="25000"/>
@@ -4116,7 +4116,7 @@
               <a:t>, es decir, vamos a especificar si haremos </a:t>
             </a:r>
             <a:r>
-              <a:rPr lang="es-MX" sz="1400" dirty="0" err="1">
+              <a:rPr lang="es-MX" sz="1200" dirty="0" err="1">
                 <a:solidFill>
                   <a:schemeClr val="bg2">
                     <a:lumMod val="25000"/>
@@ -4128,7 +4128,7 @@
               <a:t>nateo</a:t>
             </a:r>
             <a:r>
-              <a:rPr lang="es-MX" sz="1400" dirty="0">
+              <a:rPr lang="es-MX" sz="1200" dirty="0">
                 <a:solidFill>
                   <a:schemeClr val="bg2">
                     <a:lumMod val="25000"/>
@@ -4140,7 +4140,7 @@
               <a:t> interno o externo en </a:t>
             </a:r>
             <a:r>
-              <a:rPr lang="es-MX" sz="1400" b="1" dirty="0">
+              <a:rPr lang="es-MX" sz="1200" b="1" dirty="0">
                 <a:solidFill>
                   <a:schemeClr val="bg2">
                     <a:lumMod val="25000"/>
@@ -4152,7 +4152,7 @@
               <a:t>RB</a:t>
             </a:r>
             <a:r>
-              <a:rPr lang="es-MX" sz="1400" dirty="0">
+              <a:rPr lang="es-MX" sz="1200" dirty="0">
                 <a:solidFill>
                   <a:schemeClr val="bg2">
                     <a:lumMod val="25000"/>
@@ -4171,7 +4171,7 @@
               </a:lnSpc>
             </a:pPr>
             <a:r>
-              <a:rPr lang="es-MX" sz="1400" b="1" dirty="0">
+              <a:rPr lang="es-MX" sz="1200" b="1" dirty="0">
                 <a:solidFill>
                   <a:schemeClr val="accent6">
                     <a:lumMod val="75000"/>
@@ -4183,7 +4183,7 @@
               <a:t>interface </a:t>
             </a:r>
             <a:r>
-              <a:rPr lang="es-MX" sz="1400" b="1" dirty="0">
+              <a:rPr lang="es-MX" sz="1200" b="1" dirty="0">
                 <a:solidFill>
                   <a:schemeClr val="accent5">
                     <a:lumMod val="75000"/>
@@ -4202,7 +4202,7 @@
               </a:lnSpc>
             </a:pPr>
             <a:r>
-              <a:rPr lang="es-MX" sz="1400" b="1" dirty="0" err="1">
+              <a:rPr lang="es-MX" sz="1200" b="1" dirty="0" err="1">
                 <a:solidFill>
                   <a:schemeClr val="accent6">
                     <a:lumMod val="75000"/>
@@ -4214,7 +4214,7 @@
               <a:t>ip</a:t>
             </a:r>
             <a:r>
-              <a:rPr lang="es-MX" sz="1400" b="1" dirty="0">
+              <a:rPr lang="es-MX" sz="1200" b="1" dirty="0">
                 <a:solidFill>
                   <a:schemeClr val="accent6">
                     <a:lumMod val="75000"/>
@@ -4226,7 +4226,7 @@
               <a:t> </a:t>
             </a:r>
             <a:r>
-              <a:rPr lang="es-MX" sz="1400" b="1" dirty="0" err="1">
+              <a:rPr lang="es-MX" sz="1200" b="1" dirty="0" err="1">
                 <a:solidFill>
                   <a:schemeClr val="accent6">
                     <a:lumMod val="75000"/>
@@ -4238,7 +4238,7 @@
               <a:t>nat</a:t>
             </a:r>
             <a:r>
-              <a:rPr lang="es-MX" sz="1400" b="1" dirty="0">
+              <a:rPr lang="es-MX" sz="1200" b="1" dirty="0">
                 <a:solidFill>
                   <a:schemeClr val="accent6">
                     <a:lumMod val="75000"/>
@@ -4250,7 +4250,7 @@
               <a:t> </a:t>
             </a:r>
             <a:r>
-              <a:rPr lang="es-MX" sz="1400" b="1" dirty="0" err="1">
+              <a:rPr lang="es-MX" sz="1200" b="1" dirty="0" err="1">
                 <a:solidFill>
                   <a:schemeClr val="accent6">
                     <a:lumMod val="75000"/>
@@ -4261,7 +4261,7 @@
               </a:rPr>
               <a:t>inside</a:t>
             </a:r>
-            <a:endParaRPr lang="es-MX" sz="1400" b="1" dirty="0">
+            <a:endParaRPr lang="es-MX" sz="1200" b="1" dirty="0">
               <a:solidFill>
                 <a:schemeClr val="accent6">
                   <a:lumMod val="75000"/>
@@ -4278,7 +4278,7 @@
               </a:lnSpc>
             </a:pPr>
             <a:r>
-              <a:rPr lang="es-MX" sz="1400" u="sng" dirty="0">
+              <a:rPr lang="es-MX" sz="1200" u="sng" dirty="0">
                 <a:latin typeface="Arial" panose="020B0604020202020204" pitchFamily="34" charset="0"/>
                 <a:cs typeface="Arial" panose="020B0604020202020204" pitchFamily="34" charset="0"/>
               </a:rPr>
@@ -4295,7 +4295,7 @@
               </a:spcBef>
             </a:pPr>
             <a:r>
-              <a:rPr lang="es-MX" sz="1400" b="1" dirty="0">
+              <a:rPr lang="es-MX" sz="1200" b="1" dirty="0">
                 <a:solidFill>
                   <a:schemeClr val="accent6">
                     <a:lumMod val="75000"/>
@@ -4307,7 +4307,7 @@
               <a:t>interface </a:t>
             </a:r>
             <a:r>
-              <a:rPr lang="es-MX" sz="1400" b="1" dirty="0">
+              <a:rPr lang="es-MX" sz="1200" b="1" dirty="0">
                 <a:solidFill>
                   <a:schemeClr val="accent5">
                     <a:lumMod val="75000"/>
@@ -4326,7 +4326,7 @@
               </a:lnSpc>
             </a:pPr>
             <a:r>
-              <a:rPr lang="es-MX" sz="1400" b="1" dirty="0" err="1">
+              <a:rPr lang="es-MX" sz="1200" b="1" dirty="0" err="1">
                 <a:solidFill>
                   <a:schemeClr val="accent6">
                     <a:lumMod val="75000"/>
@@ -4338,7 +4338,7 @@
               <a:t>ip</a:t>
             </a:r>
             <a:r>
-              <a:rPr lang="es-MX" sz="1400" b="1" dirty="0">
+              <a:rPr lang="es-MX" sz="1200" b="1" dirty="0">
                 <a:solidFill>
                   <a:schemeClr val="accent6">
                     <a:lumMod val="75000"/>
@@ -4350,7 +4350,7 @@
               <a:t> </a:t>
             </a:r>
             <a:r>
-              <a:rPr lang="es-MX" sz="1400" b="1" dirty="0" err="1">
+              <a:rPr lang="es-MX" sz="1200" b="1" dirty="0" err="1">
                 <a:solidFill>
                   <a:schemeClr val="accent6">
                     <a:lumMod val="75000"/>
@@ -4362,7 +4362,7 @@
               <a:t>nat</a:t>
             </a:r>
             <a:r>
-              <a:rPr lang="es-MX" sz="1400" b="1" dirty="0">
+              <a:rPr lang="es-MX" sz="1200" b="1" dirty="0">
                 <a:solidFill>
                   <a:schemeClr val="accent6">
                     <a:lumMod val="75000"/>
@@ -4374,7 +4374,7 @@
               <a:t> </a:t>
             </a:r>
             <a:r>
-              <a:rPr lang="es-MX" sz="1400" b="1" dirty="0" err="1">
+              <a:rPr lang="es-MX" sz="1200" b="1" dirty="0" err="1">
                 <a:solidFill>
                   <a:schemeClr val="accent6">
                     <a:lumMod val="75000"/>
@@ -4385,7 +4385,7 @@
               </a:rPr>
               <a:t>outside</a:t>
             </a:r>
-            <a:endParaRPr lang="es-MX" sz="1400" b="1" dirty="0">
+            <a:endParaRPr lang="es-MX" sz="1200" b="1" dirty="0">
               <a:solidFill>
                 <a:schemeClr val="accent6">
                   <a:lumMod val="75000"/>
@@ -4402,20 +4402,20 @@
               </a:lnSpc>
             </a:pPr>
             <a:r>
-              <a:rPr lang="es-MX" sz="1400" u="sng" dirty="0">
+              <a:rPr lang="es-MX" sz="1200" u="sng" dirty="0">
                 <a:latin typeface="Arial" panose="020B0604020202020204" pitchFamily="34" charset="0"/>
                 <a:cs typeface="Arial" panose="020B0604020202020204" pitchFamily="34" charset="0"/>
               </a:rPr>
               <a:t>Todas las interfaces que tengamos configuradas con un proveedor de servicios (ISP</a:t>
             </a:r>
             <a:r>
-              <a:rPr lang="es-MX" sz="1400" dirty="0">
+              <a:rPr lang="es-MX" sz="1200" dirty="0">
                 <a:latin typeface="Arial" panose="020B0604020202020204" pitchFamily="34" charset="0"/>
                 <a:cs typeface="Arial" panose="020B0604020202020204" pitchFamily="34" charset="0"/>
               </a:rPr>
               <a:t>), ya que por ahí va a salir la traducción del direccionamiento privado a público.</a:t>
             </a:r>
-            <a:endParaRPr lang="es-MX" sz="1400" dirty="0">
+            <a:endParaRPr lang="es-MX" sz="1200" dirty="0">
               <a:solidFill>
                 <a:schemeClr val="bg2">
                   <a:lumMod val="25000"/>
@@ -4661,7 +4661,7 @@
         </p:nvSpPr>
         <p:spPr>
           <a:xfrm>
-            <a:off x="539552" y="1348169"/>
+            <a:off x="539552" y="1227671"/>
             <a:ext cx="8064896" cy="1524007"/>
           </a:xfrm>
           <a:prstGeom prst="rect">
@@ -4793,7 +4793,7 @@
         </p:blipFill>
         <p:spPr>
           <a:xfrm>
-            <a:off x="305780" y="2854606"/>
+            <a:off x="305780" y="2663858"/>
             <a:ext cx="8532440" cy="2884930"/>
           </a:xfrm>
           <a:prstGeom prst="rect">
@@ -5275,7 +5275,31 @@
                 <a:latin typeface="Arial" panose="020B0604020202020204" pitchFamily="34" charset="0"/>
                 <a:cs typeface="Arial" panose="020B0604020202020204" pitchFamily="34" charset="0"/>
               </a:rPr>
-              <a:t>en el ISP con el direccionamiento público asignado.</a:t>
+              <a:t>en el </a:t>
+            </a:r>
+            <a:r>
+              <a:rPr lang="es-MX" sz="1500" b="1" dirty="0">
+                <a:solidFill>
+                  <a:schemeClr val="bg2">
+                    <a:lumMod val="25000"/>
+                  </a:schemeClr>
+                </a:solidFill>
+                <a:latin typeface="Arial" panose="020B0604020202020204" pitchFamily="34" charset="0"/>
+                <a:cs typeface="Arial" panose="020B0604020202020204" pitchFamily="34" charset="0"/>
+              </a:rPr>
+              <a:t>ISP</a:t>
+            </a:r>
+            <a:r>
+              <a:rPr lang="es-MX" sz="1500" dirty="0">
+                <a:solidFill>
+                  <a:schemeClr val="bg2">
+                    <a:lumMod val="25000"/>
+                  </a:schemeClr>
+                </a:solidFill>
+                <a:latin typeface="Arial" panose="020B0604020202020204" pitchFamily="34" charset="0"/>
+                <a:cs typeface="Arial" panose="020B0604020202020204" pitchFamily="34" charset="0"/>
+              </a:rPr>
+              <a:t> con el direccionamiento público asignado.</a:t>
             </a:r>
           </a:p>
           <a:p>
@@ -5308,10 +5332,10 @@
                 <a:latin typeface="Arial" panose="020B0604020202020204" pitchFamily="34" charset="0"/>
                 <a:cs typeface="Arial" panose="020B0604020202020204" pitchFamily="34" charset="0"/>
               </a:rPr>
-              <a:t>servicio </a:t>
-            </a:r>
-            <a:r>
-              <a:rPr lang="es-MX" sz="1500" b="1">
+              <a:t>servicio de NAT y PAT</a:t>
+            </a:r>
+            <a:r>
+              <a:rPr lang="es-MX" sz="1500" dirty="0">
                 <a:solidFill>
                   <a:schemeClr val="bg2">
                     <a:lumMod val="25000"/>
@@ -5320,29 +5344,8 @@
                 <a:latin typeface="Arial" panose="020B0604020202020204" pitchFamily="34" charset="0"/>
                 <a:cs typeface="Arial" panose="020B0604020202020204" pitchFamily="34" charset="0"/>
               </a:rPr>
-              <a:t>de NAT y PAT</a:t>
-            </a:r>
-            <a:r>
-              <a:rPr lang="es-MX" sz="1500">
-                <a:solidFill>
-                  <a:schemeClr val="bg2">
-                    <a:lumMod val="25000"/>
-                  </a:schemeClr>
-                </a:solidFill>
-                <a:latin typeface="Arial" panose="020B0604020202020204" pitchFamily="34" charset="0"/>
-                <a:cs typeface="Arial" panose="020B0604020202020204" pitchFamily="34" charset="0"/>
-              </a:rPr>
               <a:t>.</a:t>
             </a:r>
-            <a:endParaRPr lang="es-MX" sz="1500" dirty="0">
-              <a:solidFill>
-                <a:schemeClr val="bg2">
-                  <a:lumMod val="25000"/>
-                </a:schemeClr>
-              </a:solidFill>
-              <a:latin typeface="Arial" panose="020B0604020202020204" pitchFamily="34" charset="0"/>
-              <a:cs typeface="Arial" panose="020B0604020202020204" pitchFamily="34" charset="0"/>
-            </a:endParaRPr>
           </a:p>
           <a:p>
             <a:pPr marL="342900" indent="-342900" algn="just">
@@ -5663,7 +5666,7 @@
                 </a:effectLst>
                 <a:latin typeface="Dom Casual" charset="0"/>
               </a:rPr>
-              <a:t>Configuración de IPS de los servidores</a:t>
+              <a:t>Configuración de IPs de los servidores</a:t>
             </a:r>
           </a:p>
         </p:txBody>
@@ -6844,7 +6847,7 @@
                 <a:latin typeface="Arial" panose="020B0604020202020204" pitchFamily="34" charset="0"/>
                 <a:cs typeface="Arial" panose="020B0604020202020204" pitchFamily="34" charset="0"/>
               </a:rPr>
-              <a:t>Máscara de subred</a:t>
+              <a:t>Máscara de subred </a:t>
             </a:r>
           </a:p>
           <a:p>
@@ -6913,7 +6916,7 @@
         </p:blipFill>
         <p:spPr>
           <a:xfrm>
-            <a:off x="143014" y="2420888"/>
+            <a:off x="152636" y="3072836"/>
             <a:ext cx="8838728" cy="2988490"/>
           </a:xfrm>
           <a:prstGeom prst="rect">
@@ -8290,7 +8293,7 @@
         <p:spPr bwMode="auto">
           <a:xfrm>
             <a:off x="323528" y="1186186"/>
-            <a:ext cx="8280920" cy="1893339"/>
+            <a:ext cx="8280920" cy="1668214"/>
           </a:xfrm>
           <a:prstGeom prst="rect">
             <a:avLst/>
@@ -8430,7 +8433,7 @@
               <a:buAutoNum type="arabicPeriod"/>
             </a:pPr>
             <a:r>
-              <a:rPr lang="es-MX" sz="1600" dirty="0">
+              <a:rPr lang="es-MX" sz="1400" dirty="0">
                 <a:solidFill>
                   <a:schemeClr val="bg2">
                     <a:lumMod val="25000"/>
@@ -8451,7 +8454,7 @@
               <a:buAutoNum type="arabicPeriod"/>
             </a:pPr>
             <a:r>
-              <a:rPr lang="es-MX" sz="1600" dirty="0">
+              <a:rPr lang="es-MX" sz="1400" dirty="0">
                 <a:solidFill>
                   <a:schemeClr val="bg2">
                     <a:lumMod val="25000"/>
@@ -8463,7 +8466,7 @@
               <a:t>Configurar el </a:t>
             </a:r>
             <a:r>
-              <a:rPr lang="es-MX" sz="1600" b="1" dirty="0">
+              <a:rPr lang="es-MX" sz="1400" b="1" dirty="0">
                 <a:solidFill>
                   <a:schemeClr val="accent6">
                     <a:lumMod val="75000"/>
@@ -8475,21 +8478,21 @@
               <a:t>servicio de NAT estático</a:t>
             </a:r>
             <a:r>
-              <a:rPr lang="es-MX" sz="1600" dirty="0">
+              <a:rPr lang="es-MX" sz="1400" dirty="0">
                 <a:latin typeface="Arial" panose="020B0604020202020204" pitchFamily="34" charset="0"/>
                 <a:cs typeface="Arial" panose="020B0604020202020204" pitchFamily="34" charset="0"/>
               </a:rPr>
               <a:t> para el servidor del </a:t>
             </a:r>
             <a:r>
-              <a:rPr lang="es-MX" sz="1600" dirty="0" err="1">
+              <a:rPr lang="es-MX" sz="1400" dirty="0" err="1">
                 <a:latin typeface="Arial" panose="020B0604020202020204" pitchFamily="34" charset="0"/>
                 <a:cs typeface="Arial" panose="020B0604020202020204" pitchFamily="34" charset="0"/>
               </a:rPr>
               <a:t>tec</a:t>
             </a:r>
             <a:r>
-              <a:rPr lang="es-MX" sz="1600" dirty="0">
+              <a:rPr lang="es-MX" sz="1400" dirty="0">
                 <a:solidFill>
                   <a:schemeClr val="bg2">
                     <a:lumMod val="25000"/>
@@ -8498,10 +8501,10 @@
                 <a:latin typeface="Arial" panose="020B0604020202020204" pitchFamily="34" charset="0"/>
                 <a:cs typeface="Arial" panose="020B0604020202020204" pitchFamily="34" charset="0"/>
               </a:rPr>
-              <a:t>. Establecer la traducción estática de direcciones de uno a uno, es decir, traducir la dirección IP privada del servidor del </a:t>
-            </a:r>
-            <a:r>
-              <a:rPr lang="es-MX" sz="1600" dirty="0" err="1">
+              <a:t>. Establecer la traducción estática de direcciones de uno a uno, es decir, traducir la </a:t>
+            </a:r>
+            <a:r>
+              <a:rPr lang="es-MX" sz="1400" b="1" dirty="0">
                 <a:solidFill>
                   <a:schemeClr val="bg2">
                     <a:lumMod val="25000"/>
@@ -8510,10 +8513,10 @@
                 <a:latin typeface="Arial" panose="020B0604020202020204" pitchFamily="34" charset="0"/>
                 <a:cs typeface="Arial" panose="020B0604020202020204" pitchFamily="34" charset="0"/>
               </a:rPr>
-              <a:t>tec</a:t>
-            </a:r>
-            <a:r>
-              <a:rPr lang="es-MX" sz="1600" dirty="0">
+              <a:t>dirección IP privada del servidor del </a:t>
+            </a:r>
+            <a:r>
+              <a:rPr lang="es-MX" sz="1400" b="1" dirty="0" err="1">
                 <a:solidFill>
                   <a:schemeClr val="bg2">
                     <a:lumMod val="25000"/>
@@ -8522,10 +8525,58 @@
                 <a:latin typeface="Arial" panose="020B0604020202020204" pitchFamily="34" charset="0"/>
                 <a:cs typeface="Arial" panose="020B0604020202020204" pitchFamily="34" charset="0"/>
               </a:rPr>
-              <a:t> por una dirección IP pública. Utiliza la primera dirección pública disponible del </a:t>
-            </a:r>
-            <a:r>
-              <a:rPr lang="es-ES" sz="1600" dirty="0">
+              <a:t>tec</a:t>
+            </a:r>
+            <a:r>
+              <a:rPr lang="es-MX" sz="1400" b="1" dirty="0">
+                <a:solidFill>
+                  <a:schemeClr val="bg2">
+                    <a:lumMod val="25000"/>
+                  </a:schemeClr>
+                </a:solidFill>
+                <a:latin typeface="Arial" panose="020B0604020202020204" pitchFamily="34" charset="0"/>
+                <a:cs typeface="Arial" panose="020B0604020202020204" pitchFamily="34" charset="0"/>
+              </a:rPr>
+              <a:t> </a:t>
+            </a:r>
+            <a:r>
+              <a:rPr lang="es-MX" sz="1400" dirty="0">
+                <a:solidFill>
+                  <a:schemeClr val="bg2">
+                    <a:lumMod val="25000"/>
+                  </a:schemeClr>
+                </a:solidFill>
+                <a:latin typeface="Arial" panose="020B0604020202020204" pitchFamily="34" charset="0"/>
+                <a:cs typeface="Arial" panose="020B0604020202020204" pitchFamily="34" charset="0"/>
+              </a:rPr>
+              <a:t>por una </a:t>
+            </a:r>
+            <a:r>
+              <a:rPr lang="es-MX" sz="1400" b="1" dirty="0">
+                <a:solidFill>
+                  <a:schemeClr val="bg2">
+                    <a:lumMod val="25000"/>
+                  </a:schemeClr>
+                </a:solidFill>
+                <a:latin typeface="Arial" panose="020B0604020202020204" pitchFamily="34" charset="0"/>
+                <a:cs typeface="Arial" panose="020B0604020202020204" pitchFamily="34" charset="0"/>
+              </a:rPr>
+              <a:t>dirección IP pública</a:t>
+            </a:r>
+            <a:r>
+              <a:rPr lang="es-MX" sz="1400" dirty="0">
+                <a:solidFill>
+                  <a:schemeClr val="bg2">
+                    <a:lumMod val="25000"/>
+                  </a:schemeClr>
+                </a:solidFill>
+                <a:latin typeface="Arial" panose="020B0604020202020204" pitchFamily="34" charset="0"/>
+                <a:cs typeface="Arial" panose="020B0604020202020204" pitchFamily="34" charset="0"/>
+              </a:rPr>
+              <a:t>. Utiliza la primera dirección pública disponible del </a:t>
+            </a:r>
+            <a:r>
+              <a:rPr lang="es-ES" sz="1400" dirty="0">
                 <a:solidFill>
                   <a:srgbClr val="EEECE1">
                     <a:lumMod val="25000"/>
@@ -8537,7 +8588,7 @@
               <a:t>POOL de direcciones IP públicas asignado: </a:t>
             </a:r>
             <a:r>
-              <a:rPr lang="es-MX" sz="1600" b="1" dirty="0">
+              <a:rPr lang="es-MX" sz="1400" b="1" dirty="0">
                 <a:solidFill>
                   <a:srgbClr val="FF0000"/>
                 </a:solidFill>
@@ -8546,7 +8597,7 @@
               </a:rPr>
               <a:t>170.15.9.32 /27</a:t>
             </a:r>
-            <a:endParaRPr lang="es-MX" sz="1600" b="1" dirty="0">
+            <a:endParaRPr lang="es-MX" sz="1400" b="1" dirty="0">
               <a:solidFill>
                 <a:schemeClr val="accent6">
                   <a:lumMod val="75000"/>
@@ -8580,7 +8631,7 @@
         </p:blipFill>
         <p:spPr>
           <a:xfrm>
-            <a:off x="89756" y="3212976"/>
+            <a:off x="89756" y="3068960"/>
             <a:ext cx="8964488" cy="3031012"/>
           </a:xfrm>
           <a:prstGeom prst="rect">
